--- a/3. Stimuli/OMIT Stimuli/OMIT Stim C.pptx
+++ b/3. Stimuli/OMIT Stimuli/OMIT Stim C.pptx
@@ -4136,7 +4136,7 @@
             </a:pPr>
             <a:r>
               <a:rPr lang="en"/>
-              <a:t>And Kendall is still feeling happy today after learning about elephants.</a:t>
+              <a:t>And Kendall is still feeling happy today, even after learning an interesting fact about elephants.</a:t>
             </a:r>
             <a:endParaRPr b="1"/>
           </a:p>
@@ -4943,20 +4943,26 @@
           <a:lstStyle/>
           <a:p>
             <a:pPr indent="0" lvl="0" marL="0" rtl="0" algn="l">
-              <a:lnSpc>
-                <a:spcPct val="100000"/>
-              </a:lnSpc>
-              <a:spcBef>
-                <a:spcPts val="0"/>
-              </a:spcBef>
-              <a:spcAft>
-                <a:spcPts val="0"/>
-              </a:spcAft>
+              <a:spcBef>
+                <a:spcPts val="0"/>
+              </a:spcBef>
+              <a:spcAft>
+                <a:spcPts val="0"/>
+              </a:spcAft>
+              <a:buClr>
+                <a:schemeClr val="dk1"/>
+              </a:buClr>
               <a:buSzPts val="1100"/>
+              <a:buFont typeface="Arial"/>
               <a:buNone/>
             </a:pPr>
             <a:r>
-              <a:t/>
+              <a:rPr lang="en">
+                <a:solidFill>
+                  <a:schemeClr val="dk1"/>
+                </a:solidFill>
+              </a:rPr>
+              <a:t>Which classmate did Kendall tell about feeling happy?</a:t>
             </a:r>
             <a:endParaRPr/>
           </a:p>
@@ -5060,20 +5066,26 @@
           <a:lstStyle/>
           <a:p>
             <a:pPr indent="0" lvl="0" marL="0" rtl="0" algn="l">
-              <a:lnSpc>
-                <a:spcPct val="100000"/>
-              </a:lnSpc>
-              <a:spcBef>
-                <a:spcPts val="0"/>
-              </a:spcBef>
-              <a:spcAft>
-                <a:spcPts val="0"/>
-              </a:spcAft>
+              <a:spcBef>
+                <a:spcPts val="0"/>
+              </a:spcBef>
+              <a:spcAft>
+                <a:spcPts val="0"/>
+              </a:spcAft>
+              <a:buClr>
+                <a:schemeClr val="dk1"/>
+              </a:buClr>
               <a:buSzPts val="1100"/>
+              <a:buFont typeface="Arial"/>
               <a:buNone/>
             </a:pPr>
             <a:r>
-              <a:t/>
+              <a:rPr lang="en">
+                <a:solidFill>
+                  <a:schemeClr val="dk1"/>
+                </a:solidFill>
+              </a:rPr>
+              <a:t>Which classmate did Kendall tell about elephants?</a:t>
             </a:r>
             <a:endParaRPr/>
           </a:p>
@@ -31178,7 +31190,7 @@
         </p:blipFill>
         <p:spPr>
           <a:xfrm>
-            <a:off x="2152300" y="3006200"/>
+            <a:off x="2152300" y="2968300"/>
             <a:ext cx="1437400" cy="1755525"/>
           </a:xfrm>
           <a:prstGeom prst="rect">
@@ -31663,8 +31675,8 @@
         </p:blipFill>
         <p:spPr>
           <a:xfrm>
-            <a:off x="2294513" y="3064665"/>
-            <a:ext cx="1367325" cy="1669949"/>
+            <a:off x="2152300" y="2968311"/>
+            <a:ext cx="1437400" cy="1755528"/>
           </a:xfrm>
           <a:prstGeom prst="rect">
             <a:avLst/>
@@ -31974,8 +31986,8 @@
         </p:blipFill>
         <p:spPr>
           <a:xfrm>
-            <a:off x="2201400" y="3011100"/>
-            <a:ext cx="1367325" cy="1669949"/>
+            <a:off x="2164100" y="2946923"/>
+            <a:ext cx="1437400" cy="1755528"/>
           </a:xfrm>
           <a:prstGeom prst="rect">
             <a:avLst/>
@@ -32503,7 +32515,7 @@
         </p:blipFill>
         <p:spPr>
           <a:xfrm>
-            <a:off x="2019525" y="2968303"/>
+            <a:off x="2152300" y="2968303"/>
             <a:ext cx="1437400" cy="1755534"/>
           </a:xfrm>
           <a:prstGeom prst="rect">
@@ -39663,8 +39675,8 @@
         </p:blipFill>
         <p:spPr>
           <a:xfrm>
-            <a:off x="4745300" y="2479600"/>
-            <a:ext cx="1367325" cy="1669949"/>
+            <a:off x="4792275" y="2394016"/>
+            <a:ext cx="1437400" cy="1755534"/>
           </a:xfrm>
           <a:prstGeom prst="rect">
             <a:avLst/>
@@ -40192,8 +40204,8 @@
         </p:blipFill>
         <p:spPr>
           <a:xfrm>
-            <a:off x="4792275" y="2479600"/>
-            <a:ext cx="1367325" cy="1669949"/>
+            <a:off x="4792275" y="2394029"/>
+            <a:ext cx="1437400" cy="1755522"/>
           </a:xfrm>
           <a:prstGeom prst="rect">
             <a:avLst/>
@@ -44132,7 +44144,7 @@
           <a:blip r:embed="rId3">
             <a:alphaModFix/>
           </a:blip>
-          <a:srcRect b="0" l="10179" r="-10179" t="0"/>
+          <a:srcRect b="0" l="10180" r="-10180" t="0"/>
           <a:stretch/>
         </p:blipFill>
         <p:spPr>
@@ -44735,7 +44747,7 @@
           <a:blip r:embed="rId3">
             <a:alphaModFix/>
           </a:blip>
-          <a:srcRect b="0" l="10179" r="-10179" t="0"/>
+          <a:srcRect b="0" l="10180" r="-10180" t="0"/>
           <a:stretch/>
         </p:blipFill>
         <p:spPr>
@@ -45402,7 +45414,7 @@
           <a:blip r:embed="rId3">
             <a:alphaModFix/>
           </a:blip>
-          <a:srcRect b="18" l="0" r="0" t="0"/>
+          <a:srcRect b="19" l="0" r="0" t="0"/>
           <a:stretch/>
         </p:blipFill>
         <p:spPr>
@@ -47661,9 +47673,9 @@
 </file>
 
 <file path=ppt/theme/theme1.xml><?xml version="1.0" encoding="utf-8"?>
-<a:theme xmlns:a="http://schemas.openxmlformats.org/drawingml/2006/main" xmlns:r="http://schemas.openxmlformats.org/officeDocument/2006/relationships" name="Simple Light">
+<a:theme xmlns:a="http://schemas.openxmlformats.org/drawingml/2006/main" xmlns:r="http://schemas.openxmlformats.org/officeDocument/2006/relationships">
   <a:themeElements>
-    <a:clrScheme name="Simple Light">
+    <a:clrScheme name="Default">
       <a:dk1>
         <a:srgbClr val="000000"/>
       </a:dk1>
@@ -47671,34 +47683,34 @@
         <a:srgbClr val="FFFFFF"/>
       </a:lt1>
       <a:dk2>
-        <a:srgbClr val="595959"/>
+        <a:srgbClr val="158158"/>
       </a:dk2>
       <a:lt2>
-        <a:srgbClr val="EEEEEE"/>
+        <a:srgbClr val="F3F3F3"/>
       </a:lt2>
       <a:accent1>
-        <a:srgbClr val="4285F4"/>
+        <a:srgbClr val="058DC7"/>
       </a:accent1>
       <a:accent2>
-        <a:srgbClr val="212121"/>
+        <a:srgbClr val="50B432"/>
       </a:accent2>
       <a:accent3>
-        <a:srgbClr val="78909C"/>
+        <a:srgbClr val="ED561B"/>
       </a:accent3>
       <a:accent4>
-        <a:srgbClr val="FFAB40"/>
+        <a:srgbClr val="EDEF00"/>
       </a:accent4>
       <a:accent5>
-        <a:srgbClr val="0097A7"/>
+        <a:srgbClr val="24CBE5"/>
       </a:accent5>
       <a:accent6>
-        <a:srgbClr val="EEFF41"/>
+        <a:srgbClr val="64E572"/>
       </a:accent6>
       <a:hlink>
-        <a:srgbClr val="0097A7"/>
+        <a:srgbClr val="2200CC"/>
       </a:hlink>
       <a:folHlink>
-        <a:srgbClr val="0097A7"/>
+        <a:srgbClr val="551A8B"/>
       </a:folHlink>
     </a:clrScheme>
     <a:fontScheme name="Office">
@@ -48219,9 +48231,9 @@
 </file>
 
 <file path=ppt/theme/theme3.xml><?xml version="1.0" encoding="utf-8"?>
-<a:theme xmlns:a="http://schemas.openxmlformats.org/drawingml/2006/main" xmlns:r="http://schemas.openxmlformats.org/officeDocument/2006/relationships">
+<a:theme xmlns:a="http://schemas.openxmlformats.org/drawingml/2006/main" xmlns:r="http://schemas.openxmlformats.org/officeDocument/2006/relationships" name="Simple Light">
   <a:themeElements>
-    <a:clrScheme name="Default">
+    <a:clrScheme name="Simple Light">
       <a:dk1>
         <a:srgbClr val="000000"/>
       </a:dk1>
@@ -48229,34 +48241,34 @@
         <a:srgbClr val="FFFFFF"/>
       </a:lt1>
       <a:dk2>
-        <a:srgbClr val="158158"/>
+        <a:srgbClr val="595959"/>
       </a:dk2>
       <a:lt2>
-        <a:srgbClr val="F3F3F3"/>
+        <a:srgbClr val="EEEEEE"/>
       </a:lt2>
       <a:accent1>
-        <a:srgbClr val="058DC7"/>
+        <a:srgbClr val="4285F4"/>
       </a:accent1>
       <a:accent2>
-        <a:srgbClr val="50B432"/>
+        <a:srgbClr val="212121"/>
       </a:accent2>
       <a:accent3>
-        <a:srgbClr val="ED561B"/>
+        <a:srgbClr val="78909C"/>
       </a:accent3>
       <a:accent4>
-        <a:srgbClr val="EDEF00"/>
+        <a:srgbClr val="FFAB40"/>
       </a:accent4>
       <a:accent5>
-        <a:srgbClr val="24CBE5"/>
+        <a:srgbClr val="0097A7"/>
       </a:accent5>
       <a:accent6>
-        <a:srgbClr val="64E572"/>
+        <a:srgbClr val="EEFF41"/>
       </a:accent6>
       <a:hlink>
-        <a:srgbClr val="2200CC"/>
+        <a:srgbClr val="0097A7"/>
       </a:hlink>
       <a:folHlink>
-        <a:srgbClr val="551A8B"/>
+        <a:srgbClr val="0097A7"/>
       </a:folHlink>
     </a:clrScheme>
     <a:fontScheme name="Office">
